--- a/lecture-6-cooperationengine/Cooperation_Engine_Lecture.pptx
+++ b/lecture-6-cooperationengine/Cooperation_Engine_Lecture.pptx
@@ -34722,12 +34722,12 @@
           <a:p>
             <a:pPr indent="0" marL="0">
               <a:lnSpc>
-                <a:spcPct val="120000"/>
+                <a:spcPct val="118000"/>
               </a:lnSpc>
               <a:buNone/>
             </a:pPr>
             <a:r>
-              <a:rPr lang="en-US" sz="1050" b="1" dirty="0">
+              <a:rPr lang="en-US" sz="1000" b="1" dirty="0">
                 <a:solidFill>
                   <a:srgbClr val="8FD4E8"/>
                 </a:solidFill>
@@ -34739,12 +34739,12 @@
             </a:r>
             <a:pPr indent="0" marL="0">
               <a:lnSpc>
-                <a:spcPct val="120000"/>
+                <a:spcPct val="118000"/>
               </a:lnSpc>
               <a:buNone/>
             </a:pPr>
             <a:r>
-              <a:rPr lang="en-US" sz="1050" dirty="0">
+              <a:rPr lang="en-US" sz="1000" dirty="0">
                 <a:solidFill>
                   <a:srgbClr val="9FC3D9"/>
                 </a:solidFill>
@@ -34756,12 +34756,12 @@
             </a:r>
             <a:pPr indent="0" marL="0">
               <a:lnSpc>
-                <a:spcPct val="120000"/>
+                <a:spcPct val="118000"/>
               </a:lnSpc>
               <a:buNone/>
             </a:pPr>
             <a:r>
-              <a:rPr lang="en-US" sz="1050" b="1" dirty="0">
+              <a:rPr lang="en-US" sz="1000" b="1" dirty="0">
                 <a:solidFill>
                   <a:srgbClr val="8FD4E8"/>
                 </a:solidFill>
@@ -34773,12 +34773,12 @@
             </a:r>
             <a:pPr indent="0" marL="0">
               <a:lnSpc>
-                <a:spcPct val="120000"/>
+                <a:spcPct val="118000"/>
               </a:lnSpc>
               <a:buNone/>
             </a:pPr>
             <a:r>
-              <a:rPr lang="en-US" sz="1050" dirty="0">
+              <a:rPr lang="en-US" sz="1000" dirty="0">
                 <a:solidFill>
                   <a:srgbClr val="9FC3D9"/>
                 </a:solidFill>
@@ -34786,9 +34786,9 @@
                 <a:ea typeface="Calibri" pitchFamily="34" charset="-122"/>
                 <a:cs typeface="Calibri" pitchFamily="34" charset="-120"/>
               </a:rPr>
-              <a:t>asks what the subject tends to do when it could do otherwise, so it is run under realistic, unhelped conditions, once. Behavioural benchmarks (does it defect, does it flatter, does it save itself) are propensity evals, and their scores are only comparable across subjects that received the same protocol.</a:t>
-            </a:r>
-            <a:endParaRPr lang="en-US" sz="1050" dirty="0"/>
+              <a:t>asks what the subject tends to do when it could do otherwise, so elicitation stays realistic and unhelped, and every attempt counts: sample one condition repeatedly and report the rate and its spread, never the best run. Behavioural benchmarks (defect? flatter? save itself?) are propensity evals, comparable only across subjects given the same protocol.</a:t>
+            </a:r>
+            <a:endParaRPr lang="en-US" sz="1000" dirty="0"/>
           </a:p>
         </p:txBody>
       </p:sp>

--- a/lecture-6-cooperationengine/Cooperation_Engine_Lecture.pptx
+++ b/lecture-6-cooperationengine/Cooperation_Engine_Lecture.pptx
@@ -7959,7 +7959,7 @@
         <p:spPr>
           <a:xfrm>
             <a:off x="548640" y="4818888"/>
-            <a:ext cx="11064240" cy="1444752"/>
+            <a:ext cx="5394960" cy="1444752"/>
           </a:xfrm>
           <a:prstGeom prst="roundRect">
             <a:avLst>
@@ -7987,8 +7987,8 @@
         </p:nvSpPr>
         <p:spPr>
           <a:xfrm>
-            <a:off x="868680" y="5029200"/>
-            <a:ext cx="457200" cy="457200"/>
+            <a:off x="822960" y="4974336"/>
+            <a:ext cx="402336" cy="402336"/>
           </a:xfrm>
           <a:prstGeom prst="ellipse">
             <a:avLst/>
@@ -8001,7 +8001,7 @@
       </p:sp>
       <p:pic>
         <p:nvPicPr>
-          <p:cNvPr id="16" name="Image 0" descr="/home/user/repo-teacher/icons/database.png">    </p:cNvPr>
+          <p:cNvPr id="16" name="Image 0" descr="/home/user/repo-teacher/icons/shuffle.png">    </p:cNvPr>
           <p:cNvPicPr>
             <a:picLocks noChangeAspect="1"/>
           </p:cNvPicPr>
@@ -8015,8 +8015,8 @@
         </p:blipFill>
         <p:spPr>
           <a:xfrm>
-            <a:off x="987552" y="5148072"/>
-            <a:ext cx="219456" cy="219456"/>
+            <a:off x="927567" y="5078943"/>
+            <a:ext cx="193121" cy="193121"/>
           </a:xfrm>
           <a:prstGeom prst="rect">
             <a:avLst/>
@@ -8031,8 +8031,8 @@
         </p:nvSpPr>
         <p:spPr>
           <a:xfrm>
-            <a:off x="1508760" y="4937760"/>
-            <a:ext cx="9875520" cy="310896"/>
+            <a:off x="1353312" y="4956048"/>
+            <a:ext cx="4389120" cy="292608"/>
           </a:xfrm>
           <a:prstGeom prst="rect">
             <a:avLst/>
@@ -8048,7 +8048,7 @@
               <a:buNone/>
             </a:pPr>
             <a:r>
-              <a:rPr lang="en-US" sz="1300" b="1" dirty="0">
+              <a:rPr lang="en-US" sz="1200" b="1" dirty="0">
                 <a:solidFill>
                   <a:srgbClr val="FFFFFF"/>
                 </a:solidFill>
@@ -8056,9 +8056,9 @@
                 <a:ea typeface="Calibri" pitchFamily="34" charset="-122"/>
                 <a:cs typeface="Calibri" pitchFamily="34" charset="-120"/>
               </a:rPr>
-              <a:t>The same metric under different conditions is a different key</a:t>
-            </a:r>
-            <a:endParaRPr lang="en-US" sz="1300" dirty="0"/>
+              <a:t>A rate has two spreads</a:t>
+            </a:r>
+            <a:endParaRPr lang="en-US" sz="1200" dirty="0"/>
           </a:p>
         </p:txBody>
       </p:sp>
@@ -8070,27 +8070,27 @@
         </p:nvSpPr>
         <p:spPr>
           <a:xfrm>
-            <a:off x="1508760" y="5257800"/>
-            <a:ext cx="9875520" cy="932688"/>
-          </a:xfrm>
-          <a:prstGeom prst="rect">
-            <a:avLst/>
-          </a:prstGeom>
-          <a:noFill/>
-          <a:ln/>
-        </p:spPr>
-        <p:txBody>
-          <a:bodyPr wrap="square" rtlCol="0" anchor="ctr"/>
+            <a:off x="822960" y="5303520"/>
+            <a:ext cx="4892040" cy="896112"/>
+          </a:xfrm>
+          <a:prstGeom prst="rect">
+            <a:avLst/>
+          </a:prstGeom>
+          <a:noFill/>
+          <a:ln/>
+        </p:spPr>
+        <p:txBody>
+          <a:bodyPr wrap="square" rtlCol="0" anchor="t"/>
           <a:lstStyle/>
           <a:p>
             <a:pPr indent="0" marL="0">
               <a:lnSpc>
-                <a:spcPct val="114000"/>
+                <a:spcPct val="110000"/>
               </a:lnSpc>
               <a:buNone/>
             </a:pPr>
             <a:r>
-              <a:rPr lang="en-US" sz="1020" dirty="0">
+              <a:rPr lang="en-US" sz="960" dirty="0">
                 <a:solidFill>
                   <a:srgbClr val="9FC3D9"/>
                 </a:solidFill>
@@ -8098,16 +8098,16 @@
                 <a:ea typeface="Calibri" pitchFamily="34" charset="-122"/>
                 <a:cs typeface="Calibri" pitchFamily="34" charset="-120"/>
               </a:rPr>
-              <a:t>“cooperation_rate” for a small model under separated framing on the unknown-horizon variant is not the same statistic as “cooperation_rate” for a frontier model under mixed framing. Store metrics under a </a:t>
+              <a:t>Re-run one item N times and the spread is </a:t>
             </a:r>
             <a:pPr indent="0" marL="0">
               <a:lnSpc>
-                <a:spcPct val="114000"/>
+                <a:spcPct val="110000"/>
               </a:lnSpc>
               <a:buNone/>
             </a:pPr>
             <a:r>
-              <a:rPr lang="en-US" sz="1020" b="1" dirty="0">
+              <a:rPr lang="en-US" sz="960" b="1" dirty="0">
                 <a:solidFill>
                   <a:srgbClr val="8FD4E8"/>
                 </a:solidFill>
@@ -8115,16 +8115,238 @@
                 <a:ea typeface="Calibri" pitchFamily="34" charset="-122"/>
                 <a:cs typeface="Calibri" pitchFamily="34" charset="-120"/>
               </a:rPr>
+              <a:t>behavioural variance</a:t>
+            </a:r>
+            <a:pPr indent="0" marL="0">
+              <a:lnSpc>
+                <a:spcPct val="110000"/>
+              </a:lnSpc>
+              <a:buNone/>
+            </a:pPr>
+            <a:r>
+              <a:rPr lang="en-US" sz="960" dirty="0">
+                <a:solidFill>
+                  <a:srgbClr val="9FC3D9"/>
+                </a:solidFill>
+                <a:latin typeface="Calibri" pitchFamily="34" charset="0"/>
+                <a:ea typeface="Calibri" pitchFamily="34" charset="-122"/>
+                <a:cs typeface="Calibri" pitchFamily="34" charset="-120"/>
+              </a:rPr>
+              <a:t>, which slide 12 turns into a test. Vary the item instead and the spread is </a:t>
+            </a:r>
+            <a:pPr indent="0" marL="0">
+              <a:lnSpc>
+                <a:spcPct val="110000"/>
+              </a:lnSpc>
+              <a:buNone/>
+            </a:pPr>
+            <a:r>
+              <a:rPr lang="en-US" sz="960" b="1" dirty="0">
+                <a:solidFill>
+                  <a:srgbClr val="8FD4E8"/>
+                </a:solidFill>
+                <a:latin typeface="Calibri" pitchFamily="34" charset="0"/>
+                <a:ea typeface="Calibri" pitchFamily="34" charset="-122"/>
+                <a:cs typeface="Calibri" pitchFamily="34" charset="-120"/>
+              </a:rPr>
+              <a:t>scenario sensitivity</a:t>
+            </a:r>
+            <a:pPr indent="0" marL="0">
+              <a:lnSpc>
+                <a:spcPct val="110000"/>
+              </a:lnSpc>
+              <a:buNone/>
+            </a:pPr>
+            <a:r>
+              <a:rPr lang="en-US" sz="960" dirty="0">
+                <a:solidFill>
+                  <a:srgbClr val="9FC3D9"/>
+                </a:solidFill>
+                <a:latin typeface="Calibri" pitchFamily="34" charset="0"/>
+                <a:ea typeface="Calibri" pitchFamily="34" charset="-122"/>
+                <a:cs typeface="Calibri" pitchFamily="34" charset="-120"/>
+              </a:rPr>
+              <a:t>, a threat on slide 14. Defecting on half of 100 runs of one prompt, and on every run of half the prompts, both report 50% and are not the same subject. Say which spread you measured.</a:t>
+            </a:r>
+            <a:endParaRPr lang="en-US" sz="960" dirty="0"/>
+          </a:p>
+        </p:txBody>
+      </p:sp>
+      <p:sp>
+        <p:nvSpPr>
+          <p:cNvPr id="19" name="Shape 15"/>
+          <p:cNvSpPr/>
+          <p:nvPr/>
+        </p:nvSpPr>
+        <p:spPr>
+          <a:xfrm>
+            <a:off x="6217920" y="4818888"/>
+            <a:ext cx="5394960" cy="1444752"/>
+          </a:xfrm>
+          <a:prstGeom prst="roundRect">
+            <a:avLst>
+              <a:gd name="adj" fmla="val 5063"/>
+            </a:avLst>
+          </a:prstGeom>
+          <a:solidFill>
+            <a:srgbClr val="16385A"/>
+          </a:solidFill>
+          <a:ln/>
+          <a:effectLst>
+            <a:outerShdw sx="100000" sy="100000" kx="0" ky="0" algn="bl" rotWithShape="0" blurRad="101600" dist="25400" dir="5400000">
+              <a:srgbClr val="1B2733">
+                <a:alpha val="8000"/>
+              </a:srgbClr>
+            </a:outerShdw>
+          </a:effectLst>
+        </p:spPr>
+      </p:sp>
+      <p:sp>
+        <p:nvSpPr>
+          <p:cNvPr id="20" name="Shape 16"/>
+          <p:cNvSpPr/>
+          <p:nvPr/>
+        </p:nvSpPr>
+        <p:spPr>
+          <a:xfrm>
+            <a:off x="6492240" y="4974336"/>
+            <a:ext cx="402336" cy="402336"/>
+          </a:xfrm>
+          <a:prstGeom prst="ellipse">
+            <a:avLst/>
+          </a:prstGeom>
+          <a:solidFill>
+            <a:srgbClr val="1C7293"/>
+          </a:solidFill>
+          <a:ln/>
+        </p:spPr>
+      </p:sp>
+      <p:pic>
+        <p:nvPicPr>
+          <p:cNvPr id="21" name="Image 1" descr="/home/user/repo-teacher/icons/database.png">    </p:cNvPr>
+          <p:cNvPicPr>
+            <a:picLocks noChangeAspect="1"/>
+          </p:cNvPicPr>
+          <p:nvPr/>
+        </p:nvPicPr>
+        <p:blipFill>
+          <a:blip r:embed="rId2"/>
+          <a:stretch>
+            <a:fillRect/>
+          </a:stretch>
+        </p:blipFill>
+        <p:spPr>
+          <a:xfrm>
+            <a:off x="6596847" y="5078943"/>
+            <a:ext cx="193121" cy="193121"/>
+          </a:xfrm>
+          <a:prstGeom prst="rect">
+            <a:avLst/>
+          </a:prstGeom>
+        </p:spPr>
+      </p:pic>
+      <p:sp>
+        <p:nvSpPr>
+          <p:cNvPr id="22" name="Text 17"/>
+          <p:cNvSpPr/>
+          <p:nvPr/>
+        </p:nvSpPr>
+        <p:spPr>
+          <a:xfrm>
+            <a:off x="7022592" y="4956048"/>
+            <a:ext cx="4389120" cy="292608"/>
+          </a:xfrm>
+          <a:prstGeom prst="rect">
+            <a:avLst/>
+          </a:prstGeom>
+          <a:noFill/>
+          <a:ln/>
+        </p:spPr>
+        <p:txBody>
+          <a:bodyPr wrap="square" lIns="0" tIns="0" rIns="0" bIns="0" rtlCol="0" anchor="ctr"/>
+          <a:lstStyle/>
+          <a:p>
+            <a:pPr indent="0" marL="0">
+              <a:buNone/>
+            </a:pPr>
+            <a:r>
+              <a:rPr lang="en-US" sz="1200" b="1" dirty="0">
+                <a:solidFill>
+                  <a:srgbClr val="FFFFFF"/>
+                </a:solidFill>
+                <a:latin typeface="Calibri" pitchFamily="34" charset="0"/>
+                <a:ea typeface="Calibri" pitchFamily="34" charset="-122"/>
+                <a:cs typeface="Calibri" pitchFamily="34" charset="-120"/>
+              </a:rPr>
+              <a:t>Conditions belong in the key</a:t>
+            </a:r>
+            <a:endParaRPr lang="en-US" sz="1200" dirty="0"/>
+          </a:p>
+        </p:txBody>
+      </p:sp>
+      <p:sp>
+        <p:nvSpPr>
+          <p:cNvPr id="23" name="Text 18"/>
+          <p:cNvSpPr/>
+          <p:nvPr/>
+        </p:nvSpPr>
+        <p:spPr>
+          <a:xfrm>
+            <a:off x="6492240" y="5303520"/>
+            <a:ext cx="4892040" cy="896112"/>
+          </a:xfrm>
+          <a:prstGeom prst="rect">
+            <a:avLst/>
+          </a:prstGeom>
+          <a:noFill/>
+          <a:ln/>
+        </p:spPr>
+        <p:txBody>
+          <a:bodyPr wrap="square" rtlCol="0" anchor="t"/>
+          <a:lstStyle/>
+          <a:p>
+            <a:pPr indent="0" marL="0">
+              <a:lnSpc>
+                <a:spcPct val="110000"/>
+              </a:lnSpc>
+              <a:buNone/>
+            </a:pPr>
+            <a:r>
+              <a:rPr lang="en-US" sz="960" dirty="0">
+                <a:solidFill>
+                  <a:srgbClr val="9FC3D9"/>
+                </a:solidFill>
+                <a:latin typeface="Calibri" pitchFamily="34" charset="0"/>
+                <a:ea typeface="Calibri" pitchFamily="34" charset="-122"/>
+                <a:cs typeface="Calibri" pitchFamily="34" charset="-120"/>
+              </a:rPr>
+              <a:t>“cooperation_rate” for a small model under separated framing is not the same statistic as that name for a frontier model under mixed framing. Store it under a </a:t>
+            </a:r>
+            <a:pPr indent="0" marL="0">
+              <a:lnSpc>
+                <a:spcPct val="110000"/>
+              </a:lnSpc>
+              <a:buNone/>
+            </a:pPr>
+            <a:r>
+              <a:rPr lang="en-US" sz="960" b="1" dirty="0">
+                <a:solidFill>
+                  <a:srgbClr val="8FD4E8"/>
+                </a:solidFill>
+                <a:latin typeface="Calibri" pitchFamily="34" charset="0"/>
+                <a:ea typeface="Calibri" pitchFamily="34" charset="-122"/>
+                <a:cs typeface="Calibri" pitchFamily="34" charset="-120"/>
+              </a:rPr>
               <a:t>structured key</a:t>
             </a:r>
             <a:pPr indent="0" marL="0">
               <a:lnSpc>
-                <a:spcPct val="114000"/>
+                <a:spcPct val="110000"/>
               </a:lnSpc>
               <a:buNone/>
             </a:pPr>
             <a:r>
-              <a:rPr lang="en-US" sz="1020" dirty="0">
+              <a:rPr lang="en-US" sz="960" dirty="0">
                 <a:solidFill>
                   <a:srgbClr val="9FC3D9"/>
                 </a:solidFill>
@@ -8132,15 +8354,15 @@
                 <a:ea typeface="Calibri" pitchFamily="34" charset="-122"/>
                 <a:cs typeface="Calibri" pitchFamily="34" charset="-120"/>
               </a:rPr>
-              <a:t> — name plus every condition axis, serialised in a stable order — so that comparing across runs is a dictionary lookup and never a string parse. A bare string name silently merges conditions that should have stayed apart.</a:t>
-            </a:r>
-            <a:endParaRPr lang="en-US" sz="1020" dirty="0"/>
-          </a:p>
-        </p:txBody>
-      </p:sp>
-      <p:sp>
-        <p:nvSpPr>
-          <p:cNvPr id="19" name="Text 15"/>
+              <a:t> — name plus every condition axis, in a stable order — so comparing runs is a lookup, not a string parse that quietly merges conditions.</a:t>
+            </a:r>
+            <a:endParaRPr lang="en-US" sz="960" dirty="0"/>
+          </a:p>
+        </p:txBody>
+      </p:sp>
+      <p:sp>
+        <p:nvSpPr>
+          <p:cNvPr id="24" name="Text 19"/>
           <p:cNvSpPr/>
           <p:nvPr/>
         </p:nvSpPr>
@@ -8179,7 +8401,7 @@
       </p:sp>
       <p:sp>
         <p:nvSpPr>
-          <p:cNvPr id="20" name="Text 16"/>
+          <p:cNvPr id="25" name="Text 20"/>
           <p:cNvSpPr/>
           <p:nvPr/>
         </p:nvSpPr>
